--- a/pictures/Memos/memo-tour-de-jeu.pptx
+++ b/pictures/Memos/memo-tour-de-jeu.pptx
@@ -11,7 +11,7 @@
     <p:sldId id="256" r:id="rId2"/>
   </p:sldIdLst>
   <p:sldSz cx="7559675" cy="10691813"/>
-  <p:notesSz cx="6858000" cy="9144000"/>
+  <p:notesSz cx="6889750" cy="10021888"/>
   <p:defaultTextStyle>
     <a:defPPr>
       <a:defRPr lang="en-US"/>
@@ -150,17 +150,17 @@
         <p:spPr>
           <a:xfrm>
             <a:off x="0" y="0"/>
-            <a:ext cx="2971800" cy="458788"/>
+            <a:ext cx="2985558" cy="502835"/>
           </a:xfrm>
           <a:prstGeom prst="rect">
             <a:avLst/>
           </a:prstGeom>
         </p:spPr>
         <p:txBody>
-          <a:bodyPr vert="horz" lIns="91440" tIns="45720" rIns="91440" bIns="45720" rtlCol="0"/>
+          <a:bodyPr vert="horz" lIns="96634" tIns="48317" rIns="96634" bIns="48317" rtlCol="0"/>
           <a:lstStyle>
             <a:lvl1pPr algn="l">
-              <a:defRPr sz="1200"/>
+              <a:defRPr sz="1300"/>
             </a:lvl1pPr>
           </a:lstStyle>
           <a:p>
@@ -180,18 +180,18 @@
         </p:nvSpPr>
         <p:spPr>
           <a:xfrm>
-            <a:off x="3884613" y="0"/>
-            <a:ext cx="2971800" cy="458788"/>
+            <a:off x="3902597" y="0"/>
+            <a:ext cx="2985558" cy="502835"/>
           </a:xfrm>
           <a:prstGeom prst="rect">
             <a:avLst/>
           </a:prstGeom>
         </p:spPr>
         <p:txBody>
-          <a:bodyPr vert="horz" lIns="91440" tIns="45720" rIns="91440" bIns="45720" rtlCol="0"/>
+          <a:bodyPr vert="horz" lIns="96634" tIns="48317" rIns="96634" bIns="48317" rtlCol="0"/>
           <a:lstStyle>
             <a:lvl1pPr algn="r">
-              <a:defRPr sz="1200"/>
+              <a:defRPr sz="1300"/>
             </a:lvl1pPr>
           </a:lstStyle>
           <a:p>
@@ -215,8 +215,8 @@
         </p:nvSpPr>
         <p:spPr>
           <a:xfrm>
-            <a:off x="2338388" y="1143000"/>
-            <a:ext cx="2181225" cy="3086100"/>
+            <a:off x="2249488" y="1252538"/>
+            <a:ext cx="2390775" cy="3382962"/>
           </a:xfrm>
           <a:prstGeom prst="rect">
             <a:avLst/>
@@ -229,7 +229,7 @@
           </a:ln>
         </p:spPr>
         <p:txBody>
-          <a:bodyPr vert="horz" lIns="91440" tIns="45720" rIns="91440" bIns="45720" rtlCol="0" anchor="ctr"/>
+          <a:bodyPr vert="horz" lIns="96634" tIns="48317" rIns="96634" bIns="48317" rtlCol="0" anchor="ctr"/>
           <a:lstStyle/>
           <a:p>
             <a:endParaRPr lang="fr-FR"/>
@@ -248,15 +248,15 @@
         </p:nvSpPr>
         <p:spPr>
           <a:xfrm>
-            <a:off x="685800" y="4400550"/>
-            <a:ext cx="5486400" cy="3600450"/>
+            <a:off x="688975" y="4823034"/>
+            <a:ext cx="5511800" cy="3946118"/>
           </a:xfrm>
           <a:prstGeom prst="rect">
             <a:avLst/>
           </a:prstGeom>
         </p:spPr>
         <p:txBody>
-          <a:bodyPr vert="horz" lIns="91440" tIns="45720" rIns="91440" bIns="45720" rtlCol="0"/>
+          <a:bodyPr vert="horz" lIns="96634" tIns="48317" rIns="96634" bIns="48317" rtlCol="0"/>
           <a:lstStyle/>
           <a:p>
             <a:pPr lvl="0"/>
@@ -307,18 +307,18 @@
         </p:nvSpPr>
         <p:spPr>
           <a:xfrm>
-            <a:off x="0" y="8685213"/>
-            <a:ext cx="2971800" cy="458787"/>
+            <a:off x="0" y="9519055"/>
+            <a:ext cx="2985558" cy="502834"/>
           </a:xfrm>
           <a:prstGeom prst="rect">
             <a:avLst/>
           </a:prstGeom>
         </p:spPr>
         <p:txBody>
-          <a:bodyPr vert="horz" lIns="91440" tIns="45720" rIns="91440" bIns="45720" rtlCol="0" anchor="b"/>
+          <a:bodyPr vert="horz" lIns="96634" tIns="48317" rIns="96634" bIns="48317" rtlCol="0" anchor="b"/>
           <a:lstStyle>
             <a:lvl1pPr algn="l">
-              <a:defRPr sz="1200"/>
+              <a:defRPr sz="1300"/>
             </a:lvl1pPr>
           </a:lstStyle>
           <a:p>
@@ -338,18 +338,18 @@
         </p:nvSpPr>
         <p:spPr>
           <a:xfrm>
-            <a:off x="3884613" y="8685213"/>
-            <a:ext cx="2971800" cy="458787"/>
+            <a:off x="3902597" y="9519055"/>
+            <a:ext cx="2985558" cy="502834"/>
           </a:xfrm>
           <a:prstGeom prst="rect">
             <a:avLst/>
           </a:prstGeom>
         </p:spPr>
         <p:txBody>
-          <a:bodyPr vert="horz" lIns="91440" tIns="45720" rIns="91440" bIns="45720" rtlCol="0" anchor="b"/>
+          <a:bodyPr vert="horz" lIns="96634" tIns="48317" rIns="96634" bIns="48317" rtlCol="0" anchor="b"/>
           <a:lstStyle>
             <a:lvl1pPr algn="r">
-              <a:defRPr sz="1200"/>
+              <a:defRPr sz="1300"/>
             </a:lvl1pPr>
           </a:lstStyle>
           <a:p>
@@ -3395,6 +3395,19 @@
 <file path=ppt/slides/slide1.xml><?xml version="1.0" encoding="utf-8"?>
 <p:sld xmlns:a="http://schemas.openxmlformats.org/drawingml/2006/main" xmlns:r="http://schemas.openxmlformats.org/officeDocument/2006/relationships" xmlns:p="http://schemas.openxmlformats.org/presentationml/2006/main">
   <p:cSld>
+    <p:bg>
+      <p:bgPr>
+        <a:blipFill dpi="0" rotWithShape="1">
+          <a:blip r:embed="rId3">
+            <a:alphaModFix amt="86000"/>
+            <a:lum/>
+          </a:blip>
+          <a:srcRect/>
+          <a:tile tx="0" ty="0" sx="100000" sy="100000" flip="none" algn="tl"/>
+        </a:blipFill>
+        <a:effectLst/>
+      </p:bgPr>
+    </p:bg>
     <p:spTree>
       <p:nvGrpSpPr>
         <p:cNvPr id="1" name=""/>
@@ -3423,8 +3436,8 @@
         </p:nvSpPr>
         <p:spPr>
           <a:xfrm>
-            <a:off x="146956" y="905610"/>
-            <a:ext cx="7115535" cy="4283610"/>
+            <a:off x="203228" y="722729"/>
+            <a:ext cx="7115535" cy="4199790"/>
           </a:xfrm>
           <a:prstGeom prst="rect">
             <a:avLst/>
@@ -3435,9 +3448,7 @@
             </a:schemeClr>
           </a:solidFill>
           <a:ln>
-            <a:solidFill>
-              <a:schemeClr val="tx1"/>
-            </a:solidFill>
+            <a:noFill/>
           </a:ln>
         </p:spPr>
         <p:txBody>
@@ -3468,8 +3479,8 @@
         </p:nvSpPr>
         <p:spPr>
           <a:xfrm>
-            <a:off x="4753908" y="2214679"/>
-            <a:ext cx="2308744" cy="2511986"/>
+            <a:off x="4810180" y="2358395"/>
+            <a:ext cx="2308744" cy="2182061"/>
           </a:xfrm>
           <a:prstGeom prst="rect">
             <a:avLst/>
@@ -3479,7 +3490,7 @@
               <a:lumMod val="85000"/>
             </a:schemeClr>
           </a:solidFill>
-          <a:ln>
+          <a:ln w="6350">
             <a:noFill/>
           </a:ln>
         </p:spPr>
@@ -3518,8 +3529,8 @@
         </p:nvSpPr>
         <p:spPr>
           <a:xfrm>
-            <a:off x="4746376" y="1333069"/>
-            <a:ext cx="2316275" cy="716712"/>
+            <a:off x="4802648" y="1150187"/>
+            <a:ext cx="2316275" cy="784815"/>
           </a:xfrm>
           <a:prstGeom prst="rect">
             <a:avLst/>
@@ -3529,7 +3540,7 @@
               <a:lumMod val="85000"/>
             </a:schemeClr>
           </a:solidFill>
-          <a:ln>
+          <a:ln w="6350">
             <a:noFill/>
           </a:ln>
         </p:spPr>
@@ -3561,32 +3572,20 @@
         </p:nvSpPr>
         <p:spPr>
           <a:xfrm>
-            <a:off x="4923879" y="2652896"/>
-            <a:ext cx="1915543" cy="1887553"/>
+            <a:off x="4980151" y="2866256"/>
+            <a:ext cx="1915543" cy="1481132"/>
           </a:xfrm>
           <a:prstGeom prst="rect">
             <a:avLst/>
           </a:prstGeom>
-          <a:blipFill dpi="0" rotWithShape="1">
-            <a:blip r:embed="rId4">
-              <a:extLst>
-                <a:ext uri="{BEBA8EAE-BF5A-486C-A8C5-ECC9F3942E4B}">
-                  <a14:imgProps xmlns:a14="http://schemas.microsoft.com/office/drawing/2010/main">
-                    <a14:imgLayer r:embed="rId5">
-                      <a14:imgEffect>
-                        <a14:brightnessContrast bright="-40000" contrast="-20000"/>
-                      </a14:imgEffect>
-                    </a14:imgLayer>
-                  </a14:imgProps>
-                </a:ext>
-                <a:ext uri="{28A0092B-C50C-407E-A947-70E740481C1C}">
-                  <a14:useLocalDpi xmlns:a14="http://schemas.microsoft.com/office/drawing/2010/main" val="0"/>
-                </a:ext>
-              </a:extLst>
-            </a:blip>
-            <a:srcRect/>
-            <a:tile tx="0" ty="0" sx="75000" sy="75000" flip="none" algn="tl"/>
-          </a:blipFill>
+          <a:solidFill>
+            <a:schemeClr val="bg1">
+              <a:lumMod val="75000"/>
+            </a:schemeClr>
+          </a:solidFill>
+          <a:ln w="6350">
+            <a:noFill/>
+          </a:ln>
         </p:spPr>
         <p:txBody>
           <a:bodyPr wrap="square" rtlCol="0">
@@ -3596,11 +3595,7 @@
           <a:p>
             <a:pPr algn="ctr"/>
             <a:r>
-              <a:rPr lang="fr-FR" sz="1117" dirty="0">
-                <a:solidFill>
-                  <a:schemeClr val="bg1"/>
-                </a:solidFill>
-              </a:rPr>
+              <a:rPr lang="fr-FR" sz="1117" dirty="0"/>
               <a:t>Piocher chaque carte</a:t>
             </a:r>
           </a:p>
@@ -3620,7 +3615,7 @@
         </p:nvSpPr>
         <p:spPr>
           <a:xfrm>
-            <a:off x="146958" y="5947897"/>
+            <a:off x="203230" y="5652471"/>
             <a:ext cx="7115536" cy="264240"/>
           </a:xfrm>
           <a:prstGeom prst="rect">
@@ -3632,9 +3627,7 @@
             </a:schemeClr>
           </a:solidFill>
           <a:ln>
-            <a:solidFill>
-              <a:schemeClr val="tx1"/>
-            </a:solidFill>
+            <a:noFill/>
           </a:ln>
         </p:spPr>
         <p:txBody>
@@ -3665,7 +3658,7 @@
         </p:nvSpPr>
         <p:spPr>
           <a:xfrm>
-            <a:off x="146957" y="260010"/>
+            <a:off x="203229" y="260010"/>
             <a:ext cx="7115538" cy="264240"/>
           </a:xfrm>
           <a:prstGeom prst="rect">
@@ -3677,9 +3670,7 @@
             </a:schemeClr>
           </a:solidFill>
           <a:ln>
-            <a:solidFill>
-              <a:schemeClr val="tx1"/>
-            </a:solidFill>
+            <a:noFill/>
           </a:ln>
         </p:spPr>
         <p:txBody>
@@ -3710,7 +3701,7 @@
         </p:nvSpPr>
         <p:spPr>
           <a:xfrm>
-            <a:off x="374470" y="1336776"/>
+            <a:off x="430742" y="1153895"/>
             <a:ext cx="4235629" cy="3389889"/>
           </a:xfrm>
           <a:prstGeom prst="rect">
@@ -3721,7 +3712,7 @@
               <a:lumMod val="85000"/>
             </a:schemeClr>
           </a:solidFill>
-          <a:ln>
+          <a:ln w="6350">
             <a:noFill/>
           </a:ln>
         </p:spPr>
@@ -3753,7 +3744,7 @@
         </p:nvSpPr>
         <p:spPr>
           <a:xfrm>
-            <a:off x="5046792" y="1623202"/>
+            <a:off x="5103064" y="1440321"/>
             <a:ext cx="1647500" cy="264240"/>
           </a:xfrm>
           <a:prstGeom prst="rect">
@@ -3765,9 +3756,7 @@
             </a:schemeClr>
           </a:solidFill>
           <a:ln>
-            <a:solidFill>
-              <a:schemeClr val="tx1"/>
-            </a:solidFill>
+            <a:noFill/>
           </a:ln>
         </p:spPr>
         <p:txBody>
@@ -3798,7 +3787,7 @@
         </p:nvSpPr>
         <p:spPr>
           <a:xfrm>
-            <a:off x="146957" y="5467459"/>
+            <a:off x="203229" y="5172033"/>
             <a:ext cx="7115537" cy="264240"/>
           </a:xfrm>
           <a:prstGeom prst="rect">
@@ -3810,9 +3799,7 @@
             </a:schemeClr>
           </a:solidFill>
           <a:ln>
-            <a:solidFill>
-              <a:schemeClr val="tx1"/>
-            </a:solidFill>
+            <a:noFill/>
           </a:ln>
         </p:spPr>
         <p:txBody>
@@ -3843,16 +3830,14 @@
         </p:nvSpPr>
         <p:spPr>
           <a:xfrm>
-            <a:off x="5089153" y="3079208"/>
+            <a:off x="5115154" y="3196538"/>
             <a:ext cx="1691262" cy="436145"/>
           </a:xfrm>
           <a:prstGeom prst="rect">
             <a:avLst/>
           </a:prstGeom>
           <a:solidFill>
-            <a:schemeClr val="bg1">
-              <a:lumMod val="75000"/>
-            </a:schemeClr>
+            <a:schemeClr val="bg1"/>
           </a:solidFill>
         </p:spPr>
         <p:txBody>
@@ -3893,17 +3878,15 @@
         </p:nvSpPr>
         <p:spPr>
           <a:xfrm>
-            <a:off x="5089153" y="3725069"/>
+            <a:off x="5103064" y="3768779"/>
             <a:ext cx="1691262" cy="436145"/>
           </a:xfrm>
           <a:prstGeom prst="rect">
             <a:avLst/>
           </a:prstGeom>
-          <a:blipFill dpi="0" rotWithShape="1">
-            <a:blip r:embed="rId6"/>
-            <a:srcRect/>
-            <a:tile tx="0" ty="0" sx="100000" sy="100000" flip="none" algn="tl"/>
-          </a:blipFill>
+          <a:solidFill>
+            <a:schemeClr val="bg1"/>
+          </a:solidFill>
         </p:spPr>
         <p:txBody>
           <a:bodyPr wrap="square" rtlCol="0">
@@ -3913,30 +3896,19 @@
           <a:p>
             <a:pPr algn="ctr"/>
             <a:r>
+              <a:rPr lang="fr-FR" sz="1117" dirty="0"/>
+              <a:t>Evénement tiré </a:t>
+            </a:r>
+          </a:p>
+          <a:p>
+            <a:pPr algn="ctr"/>
+            <a:r>
               <a:rPr lang="fr-FR" sz="1117" dirty="0">
-                <a:solidFill>
-                  <a:schemeClr val="bg1"/>
-                </a:solidFill>
-              </a:rPr>
-              <a:t>Evénement tiré </a:t>
-            </a:r>
-          </a:p>
-          <a:p>
-            <a:pPr algn="ctr"/>
-            <a:r>
-              <a:rPr lang="fr-FR" sz="1117" dirty="0">
-                <a:solidFill>
-                  <a:schemeClr val="bg1"/>
-                </a:solidFill>
                 <a:sym typeface="Wingdings" panose="05000000000000000000" pitchFamily="2" charset="2"/>
               </a:rPr>
               <a:t> Résoudre la Calamité</a:t>
             </a:r>
-            <a:endParaRPr lang="fr-FR" sz="1117" dirty="0">
-              <a:solidFill>
-                <a:schemeClr val="bg1"/>
-              </a:solidFill>
-            </a:endParaRPr>
+            <a:endParaRPr lang="fr-FR" sz="1117" dirty="0"/>
           </a:p>
         </p:txBody>
       </p:sp>
@@ -3958,13 +3930,16 @@
         </p:nvCxnSpPr>
         <p:spPr>
           <a:xfrm>
-            <a:off x="3704726" y="5731699"/>
+            <a:off x="3760998" y="5436273"/>
             <a:ext cx="0" cy="216198"/>
           </a:xfrm>
           <a:prstGeom prst="straightConnector1">
             <a:avLst/>
           </a:prstGeom>
           <a:ln>
+            <a:solidFill>
+              <a:schemeClr val="bg1"/>
+            </a:solidFill>
             <a:tailEnd type="triangle"/>
           </a:ln>
         </p:spPr>
@@ -4001,13 +3976,16 @@
         </p:nvCxnSpPr>
         <p:spPr>
           <a:xfrm flipH="1">
-            <a:off x="3704724" y="524250"/>
-            <a:ext cx="2" cy="381360"/>
+            <a:off x="3760996" y="524250"/>
+            <a:ext cx="2" cy="198479"/>
           </a:xfrm>
           <a:prstGeom prst="straightConnector1">
             <a:avLst/>
           </a:prstGeom>
           <a:ln>
+            <a:solidFill>
+              <a:schemeClr val="bg1"/>
+            </a:solidFill>
             <a:tailEnd type="triangle"/>
           </a:ln>
         </p:spPr>
@@ -4040,7 +4018,7 @@
         </p:nvSpPr>
         <p:spPr>
           <a:xfrm>
-            <a:off x="510492" y="1621018"/>
+            <a:off x="566764" y="1438137"/>
             <a:ext cx="3935305" cy="373170"/>
           </a:xfrm>
           <a:prstGeom prst="rect">
@@ -4051,7 +4029,7 @@
               <a:lumMod val="75000"/>
             </a:schemeClr>
           </a:solidFill>
-          <a:ln>
+          <a:ln w="6350">
             <a:noFill/>
           </a:ln>
         </p:spPr>
@@ -4083,7 +4061,7 @@
         </p:nvSpPr>
         <p:spPr>
           <a:xfrm>
-            <a:off x="496291" y="2277712"/>
+            <a:off x="552563" y="2094831"/>
             <a:ext cx="3963708" cy="2309528"/>
           </a:xfrm>
           <a:prstGeom prst="rect">
@@ -4094,7 +4072,7 @@
               <a:lumMod val="75000"/>
             </a:schemeClr>
           </a:solidFill>
-          <a:ln>
+          <a:ln w="6350">
             <a:noFill/>
           </a:ln>
         </p:spPr>
@@ -4130,7 +4108,7 @@
         </p:nvCxnSpPr>
         <p:spPr>
           <a:xfrm>
-            <a:off x="2478145" y="1994188"/>
+            <a:off x="2534417" y="1811307"/>
             <a:ext cx="0" cy="283524"/>
           </a:xfrm>
           <a:prstGeom prst="straightConnector1">
@@ -4169,7 +4147,7 @@
         </p:nvSpPr>
         <p:spPr>
           <a:xfrm>
-            <a:off x="2569523" y="2549619"/>
+            <a:off x="2625795" y="2366738"/>
             <a:ext cx="1682065" cy="264240"/>
           </a:xfrm>
           <a:prstGeom prst="rect">
@@ -4207,7 +4185,7 @@
         </p:nvSpPr>
         <p:spPr>
           <a:xfrm>
-            <a:off x="2564838" y="2904674"/>
+            <a:off x="2621110" y="2721793"/>
             <a:ext cx="1656369" cy="264240"/>
           </a:xfrm>
           <a:prstGeom prst="rect">
@@ -4245,7 +4223,7 @@
         </p:nvSpPr>
         <p:spPr>
           <a:xfrm>
-            <a:off x="2573273" y="3285410"/>
+            <a:off x="2629545" y="3102529"/>
             <a:ext cx="1682065" cy="264240"/>
           </a:xfrm>
           <a:prstGeom prst="rect">
@@ -4283,18 +4261,18 @@
         </p:nvSpPr>
         <p:spPr>
           <a:xfrm>
-            <a:off x="2564838" y="3667919"/>
+            <a:off x="2621110" y="3485038"/>
             <a:ext cx="1682065" cy="610061"/>
           </a:xfrm>
           <a:prstGeom prst="rect">
             <a:avLst/>
           </a:prstGeom>
           <a:blipFill>
-            <a:blip r:embed="rId7">
+            <a:blip r:embed="rId4">
               <a:extLst>
                 <a:ext uri="{BEBA8EAE-BF5A-486C-A8C5-ECC9F3942E4B}">
                   <a14:imgProps xmlns:a14="http://schemas.microsoft.com/office/drawing/2010/main">
-                    <a14:imgLayer r:embed="rId8">
+                    <a14:imgLayer r:embed="rId5">
                       <a14:imgEffect>
                         <a14:artisticWatercolorSponge/>
                       </a14:imgEffect>
@@ -4308,6 +4286,11 @@
             </a:blip>
             <a:tile tx="0" ty="0" sx="100000" sy="100000" flip="none" algn="tl"/>
           </a:blipFill>
+          <a:ln w="6350">
+            <a:solidFill>
+              <a:schemeClr val="tx1"/>
+            </a:solidFill>
+          </a:ln>
         </p:spPr>
         <p:txBody>
           <a:bodyPr wrap="square" rtlCol="0">
@@ -4337,20 +4320,20 @@
         </p:nvSpPr>
         <p:spPr>
           <a:xfrm>
-            <a:off x="669446" y="2554517"/>
+            <a:off x="725718" y="2371636"/>
             <a:ext cx="1691666" cy="1918423"/>
           </a:xfrm>
           <a:prstGeom prst="rect">
             <a:avLst/>
           </a:prstGeom>
           <a:blipFill>
-            <a:blip r:embed="rId9">
+            <a:blip r:embed="rId6">
               <a:extLst>
                 <a:ext uri="{BEBA8EAE-BF5A-486C-A8C5-ECC9F3942E4B}">
                   <a14:imgProps xmlns:a14="http://schemas.microsoft.com/office/drawing/2010/main">
-                    <a14:imgLayer r:embed="rId10">
+                    <a14:imgLayer r:embed="rId7">
                       <a14:imgEffect>
-                        <a14:artisticWatercolorSponge/>
+                        <a14:artisticLineDrawing/>
                       </a14:imgEffect>
                     </a14:imgLayer>
                   </a14:imgProps>
@@ -4388,14 +4371,14 @@
         </p:nvSpPr>
         <p:spPr>
           <a:xfrm>
-            <a:off x="776188" y="2954894"/>
+            <a:off x="832460" y="2772013"/>
             <a:ext cx="1463066" cy="285237"/>
           </a:xfrm>
           <a:prstGeom prst="rect">
             <a:avLst/>
           </a:prstGeom>
           <a:blipFill>
-            <a:blip r:embed="rId11"/>
+            <a:blip r:embed="rId3"/>
             <a:tile tx="0" ty="0" sx="100000" sy="100000" flip="none" algn="tl"/>
           </a:blipFill>
         </p:spPr>
@@ -4435,8 +4418,8 @@
         </p:nvCxnSpPr>
         <p:spPr>
           <a:xfrm>
-            <a:off x="5904514" y="2049781"/>
-            <a:ext cx="3766" cy="164898"/>
+            <a:off x="5960786" y="1935002"/>
+            <a:ext cx="3766" cy="423393"/>
           </a:xfrm>
           <a:prstGeom prst="straightConnector1">
             <a:avLst/>
@@ -4474,14 +4457,14 @@
         </p:nvSpPr>
         <p:spPr>
           <a:xfrm>
-            <a:off x="776188" y="3322009"/>
+            <a:off x="832460" y="3139128"/>
             <a:ext cx="1463066" cy="285237"/>
           </a:xfrm>
           <a:prstGeom prst="rect">
             <a:avLst/>
           </a:prstGeom>
           <a:blipFill>
-            <a:blip r:embed="rId11"/>
+            <a:blip r:embed="rId3"/>
             <a:tile tx="0" ty="0" sx="100000" sy="100000" flip="none" algn="tl"/>
           </a:blipFill>
         </p:spPr>
@@ -4517,14 +4500,14 @@
         </p:nvSpPr>
         <p:spPr>
           <a:xfrm>
-            <a:off x="776188" y="3679759"/>
+            <a:off x="832460" y="3496878"/>
             <a:ext cx="1463066" cy="285237"/>
           </a:xfrm>
           <a:prstGeom prst="rect">
             <a:avLst/>
           </a:prstGeom>
           <a:blipFill>
-            <a:blip r:embed="rId11"/>
+            <a:blip r:embed="rId3"/>
             <a:tile tx="0" ty="0" sx="100000" sy="100000" flip="none" algn="tl"/>
           </a:blipFill>
         </p:spPr>
@@ -4560,14 +4543,14 @@
         </p:nvSpPr>
         <p:spPr>
           <a:xfrm>
-            <a:off x="776188" y="4045238"/>
+            <a:off x="832460" y="3862357"/>
             <a:ext cx="1463066" cy="285237"/>
           </a:xfrm>
           <a:prstGeom prst="rect">
             <a:avLst/>
           </a:prstGeom>
           <a:blipFill>
-            <a:blip r:embed="rId11"/>
+            <a:blip r:embed="rId3"/>
             <a:tile tx="0" ty="0" sx="100000" sy="100000" flip="none" algn="tl"/>
           </a:blipFill>
         </p:spPr>
@@ -4603,32 +4586,20 @@
         </p:nvSpPr>
         <p:spPr>
           <a:xfrm>
-            <a:off x="2636869" y="3897188"/>
+            <a:off x="2693141" y="3714307"/>
             <a:ext cx="1512306" cy="274944"/>
           </a:xfrm>
           <a:prstGeom prst="rect">
             <a:avLst/>
           </a:prstGeom>
-          <a:blipFill dpi="0" rotWithShape="1">
-            <a:blip r:embed="rId4">
-              <a:extLst>
-                <a:ext uri="{BEBA8EAE-BF5A-486C-A8C5-ECC9F3942E4B}">
-                  <a14:imgProps xmlns:a14="http://schemas.microsoft.com/office/drawing/2010/main">
-                    <a14:imgLayer r:embed="rId5">
-                      <a14:imgEffect>
-                        <a14:brightnessContrast bright="-40000" contrast="-20000"/>
-                      </a14:imgEffect>
-                    </a14:imgLayer>
-                  </a14:imgProps>
-                </a:ext>
-                <a:ext uri="{28A0092B-C50C-407E-A947-70E740481C1C}">
-                  <a14:useLocalDpi xmlns:a14="http://schemas.microsoft.com/office/drawing/2010/main" val="0"/>
-                </a:ext>
-              </a:extLst>
-            </a:blip>
-            <a:srcRect/>
-            <a:tile tx="0" ty="0" sx="75000" sy="75000" flip="none" algn="tl"/>
-          </a:blipFill>
+          <a:solidFill>
+            <a:schemeClr val="bg1">
+              <a:lumMod val="75000"/>
+            </a:schemeClr>
+          </a:solidFill>
+          <a:ln w="6350">
+            <a:noFill/>
+          </a:ln>
         </p:spPr>
         <p:txBody>
           <a:bodyPr wrap="square" rtlCol="0">
@@ -4638,11 +4609,7 @@
           <a:p>
             <a:pPr algn="ctr"/>
             <a:r>
-              <a:rPr lang="fr-FR" sz="1117" dirty="0">
-                <a:solidFill>
-                  <a:schemeClr val="bg1"/>
-                </a:solidFill>
-              </a:rPr>
+              <a:rPr lang="fr-FR" sz="1117" dirty="0"/>
               <a:t>Piocher chaque carte</a:t>
             </a:r>
           </a:p>
@@ -4665,13 +4632,13 @@
           <p:nvPr/>
         </p:nvCxnSpPr>
         <p:spPr>
-          <a:xfrm rot="16200000" flipH="1">
-            <a:off x="4200282" y="3018667"/>
-            <a:ext cx="12700" cy="3415995"/>
+          <a:xfrm rot="5400000" flipH="1" flipV="1">
+            <a:off x="4254890" y="2834122"/>
+            <a:ext cx="3328" cy="3415995"/>
           </a:xfrm>
           <a:prstGeom prst="bentConnector3">
             <a:avLst>
-              <a:gd name="adj1" fmla="val 1800000"/>
+              <a:gd name="adj1" fmla="val -6868990"/>
             </a:avLst>
           </a:prstGeom>
           <a:ln>
@@ -4711,13 +4678,16 @@
         </p:nvCxnSpPr>
         <p:spPr>
           <a:xfrm>
-            <a:off x="3704724" y="5189220"/>
-            <a:ext cx="2" cy="278239"/>
+            <a:off x="3760996" y="4922519"/>
+            <a:ext cx="2" cy="249514"/>
           </a:xfrm>
           <a:prstGeom prst="straightConnector1">
             <a:avLst/>
           </a:prstGeom>
           <a:ln>
+            <a:solidFill>
+              <a:schemeClr val="bg1"/>
+            </a:solidFill>
             <a:tailEnd type="triangle"/>
           </a:ln>
         </p:spPr>
@@ -4736,259 +4706,313 @@
           </a:fontRef>
         </p:style>
       </p:cxnSp>
-      <p:grpSp>
-        <p:nvGrpSpPr>
-          <p:cNvPr id="279" name="Groupe 278">
+      <p:pic>
+        <p:nvPicPr>
+          <p:cNvPr id="281" name="Image 280">
             <a:extLst>
               <a:ext uri="{FF2B5EF4-FFF2-40B4-BE49-F238E27FC236}">
-                <a16:creationId xmlns:a16="http://schemas.microsoft.com/office/drawing/2014/main" id="{2D726873-21FC-B8ED-50C0-F16C858613D3}"/>
+                <a16:creationId xmlns:a16="http://schemas.microsoft.com/office/drawing/2014/main" id="{40D53DC9-6925-AB04-72B3-7DEE8F62EC78}"/>
               </a:ext>
             </a:extLst>
           </p:cNvPr>
-          <p:cNvGrpSpPr/>
+          <p:cNvPicPr>
+            <a:picLocks noChangeAspect="1"/>
+          </p:cNvPicPr>
+          <p:nvPr/>
+        </p:nvPicPr>
+        <p:blipFill rotWithShape="1">
+          <a:blip r:embed="rId8">
+            <a:extLst>
+              <a:ext uri="{28A0092B-C50C-407E-A947-70E740481C1C}">
+                <a14:useLocalDpi xmlns:a14="http://schemas.microsoft.com/office/drawing/2010/main" val="0"/>
+              </a:ext>
+            </a:extLst>
+          </a:blip>
+          <a:srcRect l="32307" r="32393" b="13652"/>
+          <a:stretch>
+            <a:fillRect/>
+          </a:stretch>
+        </p:blipFill>
+        <p:spPr bwMode="auto">
+          <a:xfrm>
+            <a:off x="208147" y="6121536"/>
+            <a:ext cx="5194936" cy="2621346"/>
+          </a:xfrm>
+          <a:prstGeom prst="rect">
+            <a:avLst/>
+          </a:prstGeom>
+          <a:noFill/>
+          <a:ln>
+            <a:noFill/>
+          </a:ln>
+          <a:extLst>
+            <a:ext uri="{53640926-AAD7-44D8-BBD7-CCE9431645EC}">
+              <a14:shadowObscured xmlns:a14="http://schemas.microsoft.com/office/drawing/2010/main"/>
+            </a:ext>
+          </a:extLst>
+        </p:spPr>
+      </p:pic>
+      <p:pic>
+        <p:nvPicPr>
+          <p:cNvPr id="282" name="Image 281">
+            <a:extLst>
+              <a:ext uri="{FF2B5EF4-FFF2-40B4-BE49-F238E27FC236}">
+                <a16:creationId xmlns:a16="http://schemas.microsoft.com/office/drawing/2014/main" id="{D2B5E59A-955D-6E37-70A8-EF428207DD59}"/>
+              </a:ext>
+            </a:extLst>
+          </p:cNvPr>
+          <p:cNvPicPr>
+            <a:picLocks noChangeAspect="1"/>
+          </p:cNvPicPr>
+          <p:nvPr/>
+        </p:nvPicPr>
+        <p:blipFill rotWithShape="1">
+          <a:blip r:embed="rId9">
+            <a:extLst>
+              <a:ext uri="{28A0092B-C50C-407E-A947-70E740481C1C}">
+                <a14:useLocalDpi xmlns:a14="http://schemas.microsoft.com/office/drawing/2010/main" val="0"/>
+              </a:ext>
+            </a:extLst>
+          </a:blip>
+          <a:srcRect l="35764" r="35779" b="24600"/>
+          <a:stretch>
+            <a:fillRect/>
+          </a:stretch>
+        </p:blipFill>
+        <p:spPr bwMode="auto">
+          <a:xfrm>
+            <a:off x="2425928" y="8880506"/>
+            <a:ext cx="4892835" cy="1451827"/>
+          </a:xfrm>
+          <a:prstGeom prst="rect">
+            <a:avLst/>
+          </a:prstGeom>
+          <a:noFill/>
+          <a:ln>
+            <a:noFill/>
+          </a:ln>
+          <a:extLst>
+            <a:ext uri="{53640926-AAD7-44D8-BBD7-CCE9431645EC}">
+              <a14:shadowObscured xmlns:a14="http://schemas.microsoft.com/office/drawing/2010/main"/>
+            </a:ext>
+          </a:extLst>
+        </p:spPr>
+      </p:pic>
+      <p:pic>
+        <p:nvPicPr>
+          <p:cNvPr id="283" name="Image 282">
+            <a:extLst>
+              <a:ext uri="{FF2B5EF4-FFF2-40B4-BE49-F238E27FC236}">
+                <a16:creationId xmlns:a16="http://schemas.microsoft.com/office/drawing/2014/main" id="{08814F9E-50BE-0635-BF03-7D7E6B225C9D}"/>
+              </a:ext>
+            </a:extLst>
+          </p:cNvPr>
+          <p:cNvPicPr>
+            <a:picLocks noChangeAspect="1"/>
+          </p:cNvPicPr>
+          <p:nvPr/>
+        </p:nvPicPr>
+        <p:blipFill>
+          <a:blip r:embed="rId10">
+            <a:lum bright="70000" contrast="-70000"/>
+            <a:extLst>
+              <a:ext uri="{28A0092B-C50C-407E-A947-70E740481C1C}">
+                <a14:useLocalDpi xmlns:a14="http://schemas.microsoft.com/office/drawing/2010/main" val="0"/>
+              </a:ext>
+            </a:extLst>
+          </a:blip>
+          <a:srcRect/>
+          <a:stretch>
+            <a:fillRect/>
+          </a:stretch>
+        </p:blipFill>
+        <p:spPr bwMode="auto">
+          <a:xfrm>
+            <a:off x="5403083" y="6438967"/>
+            <a:ext cx="2130628" cy="2130568"/>
+          </a:xfrm>
+          <a:prstGeom prst="rect">
+            <a:avLst/>
+          </a:prstGeom>
+          <a:noFill/>
+          <a:ln>
+            <a:noFill/>
+          </a:ln>
+        </p:spPr>
+      </p:pic>
+      <p:pic>
+        <p:nvPicPr>
+          <p:cNvPr id="284" name="Image 283">
+            <a:extLst>
+              <a:ext uri="{FF2B5EF4-FFF2-40B4-BE49-F238E27FC236}">
+                <a16:creationId xmlns:a16="http://schemas.microsoft.com/office/drawing/2014/main" id="{5B5F9645-D9FA-651C-390F-15C1E32D7521}"/>
+              </a:ext>
+            </a:extLst>
+          </p:cNvPr>
+          <p:cNvPicPr>
+            <a:picLocks noChangeAspect="1"/>
+          </p:cNvPicPr>
+          <p:nvPr/>
+        </p:nvPicPr>
+        <p:blipFill>
+          <a:blip r:embed="rId10">
+            <a:lum bright="70000" contrast="-70000"/>
+            <a:extLst>
+              <a:ext uri="{28A0092B-C50C-407E-A947-70E740481C1C}">
+                <a14:useLocalDpi xmlns:a14="http://schemas.microsoft.com/office/drawing/2010/main" val="0"/>
+              </a:ext>
+            </a:extLst>
+          </a:blip>
+          <a:srcRect/>
+          <a:stretch>
+            <a:fillRect/>
+          </a:stretch>
+        </p:blipFill>
+        <p:spPr bwMode="auto">
+          <a:xfrm flipH="1">
+            <a:off x="430742" y="8880506"/>
+            <a:ext cx="1558607" cy="1558566"/>
+          </a:xfrm>
+          <a:prstGeom prst="rect">
+            <a:avLst/>
+          </a:prstGeom>
+          <a:noFill/>
+          <a:ln>
+            <a:noFill/>
+          </a:ln>
+        </p:spPr>
+      </p:pic>
+      <p:grpSp>
+        <p:nvGrpSpPr>
+          <p:cNvPr id="2056" name="Groupe 1"/>
+          <p:cNvGrpSpPr>
+            <a:grpSpLocks noChangeAspect="1"/>
+          </p:cNvGrpSpPr>
           <p:nvPr/>
         </p:nvGrpSpPr>
-        <p:grpSpPr>
-          <a:xfrm>
-            <a:off x="1724793" y="6635529"/>
-            <a:ext cx="3959860" cy="3121025"/>
+        <p:grpSpPr bwMode="auto">
+          <a:xfrm>
+            <a:off x="0" y="0"/>
+            <a:ext cx="479425" cy="504825"/>
             <a:chOff x="0" y="0"/>
-            <a:chExt cx="3960390" cy="3121564"/>
+            <a:chExt cx="7229" cy="7654"/>
           </a:xfrm>
         </p:grpSpPr>
-        <p:sp>
-          <p:nvSpPr>
-            <p:cNvPr id="280" name="Rectangle 279">
-              <a:extLst>
-                <a:ext uri="{FF2B5EF4-FFF2-40B4-BE49-F238E27FC236}">
-                  <a16:creationId xmlns:a16="http://schemas.microsoft.com/office/drawing/2014/main" id="{1D0E01E4-56A6-5023-701C-DF6E876F4406}"/>
-                </a:ext>
-              </a:extLst>
-            </p:cNvPr>
-            <p:cNvSpPr/>
-            <p:nvPr/>
-          </p:nvSpPr>
-          <p:spPr>
-            <a:xfrm>
-              <a:off x="0" y="0"/>
-              <a:ext cx="3960390" cy="3121564"/>
-            </a:xfrm>
-            <a:prstGeom prst="rect">
-              <a:avLst/>
-            </a:prstGeom>
-            <a:noFill/>
-            <a:ln>
-              <a:solidFill>
-                <a:schemeClr val="bg1"/>
-              </a:solidFill>
-            </a:ln>
-          </p:spPr>
-          <p:style>
-            <a:lnRef idx="2">
-              <a:schemeClr val="accent1">
-                <a:shade val="15000"/>
-              </a:schemeClr>
-            </a:lnRef>
-            <a:fillRef idx="1">
-              <a:schemeClr val="accent1"/>
-            </a:fillRef>
-            <a:effectRef idx="0">
-              <a:schemeClr val="accent1"/>
-            </a:effectRef>
-            <a:fontRef idx="minor">
-              <a:schemeClr val="lt1"/>
-            </a:fontRef>
-          </p:style>
-          <p:txBody>
-            <a:bodyPr rot="0" spcFirstLastPara="0" vert="horz" wrap="square" lIns="91440" tIns="45720" rIns="91440" bIns="45720" numCol="1" spcCol="0" rtlCol="0" fromWordArt="0" anchor="ctr" anchorCtr="0" forceAA="0" compatLnSpc="1">
-              <a:prstTxWarp prst="textNoShape">
-                <a:avLst/>
-              </a:prstTxWarp>
-              <a:noAutofit/>
-            </a:bodyPr>
-            <a:lstStyle/>
-            <a:p>
-              <a:endParaRPr lang="fr-FR"/>
-            </a:p>
-          </p:txBody>
-        </p:sp>
-        <p:pic>
-          <p:nvPicPr>
-            <p:cNvPr id="281" name="Image 280">
-              <a:extLst>
-                <a:ext uri="{FF2B5EF4-FFF2-40B4-BE49-F238E27FC236}">
-                  <a16:creationId xmlns:a16="http://schemas.microsoft.com/office/drawing/2014/main" id="{40D53DC9-6925-AB04-72B3-7DEE8F62EC78}"/>
-                </a:ext>
-              </a:extLst>
-            </p:cNvPr>
-            <p:cNvPicPr>
-              <a:picLocks noChangeAspect="1"/>
-            </p:cNvPicPr>
-            <p:nvPr/>
-          </p:nvPicPr>
-          <p:blipFill rotWithShape="1">
-            <a:blip r:embed="rId12">
-              <a:extLst>
-                <a:ext uri="{28A0092B-C50C-407E-A947-70E740481C1C}">
-                  <a14:useLocalDpi xmlns:a14="http://schemas.microsoft.com/office/drawing/2010/main" val="0"/>
-                </a:ext>
-              </a:extLst>
-            </a:blip>
-            <a:srcRect l="32307" r="32393" b="13652"/>
-            <a:stretch>
-              <a:fillRect/>
-            </a:stretch>
-          </p:blipFill>
-          <p:spPr bwMode="auto">
-            <a:xfrm>
-              <a:off x="169205" y="136790"/>
-              <a:ext cx="3645535" cy="1839595"/>
-            </a:xfrm>
-            <a:prstGeom prst="rect">
-              <a:avLst/>
-            </a:prstGeom>
-            <a:noFill/>
-            <a:ln>
-              <a:noFill/>
-            </a:ln>
+      </p:grpSp>
+      <p:grpSp>
+        <p:nvGrpSpPr>
+          <p:cNvPr id="2052" name="Group 4"/>
+          <p:cNvGrpSpPr>
+            <a:grpSpLocks noChangeAspect="1"/>
+          </p:cNvGrpSpPr>
+          <p:nvPr/>
+        </p:nvGrpSpPr>
+        <p:grpSpPr bwMode="auto">
+          <a:xfrm>
+            <a:off x="0" y="0"/>
+            <a:ext cx="479425" cy="504825"/>
+            <a:chOff x="18297" y="0"/>
+            <a:chExt cx="7229" cy="7654"/>
+          </a:xfrm>
+        </p:grpSpPr>
+      </p:grpSp>
+      <p:grpSp>
+        <p:nvGrpSpPr>
+          <p:cNvPr id="2049" name="Group 1"/>
+          <p:cNvGrpSpPr>
+            <a:grpSpLocks noChangeAspect="1"/>
+          </p:cNvGrpSpPr>
+          <p:nvPr/>
+        </p:nvGrpSpPr>
+        <p:grpSpPr bwMode="auto">
+          <a:xfrm>
+            <a:off x="0" y="0"/>
+            <a:ext cx="479425" cy="504825"/>
+            <a:chOff x="9153" y="0"/>
+            <a:chExt cx="7229" cy="7654"/>
+          </a:xfrm>
+        </p:grpSpPr>
+      </p:grpSp>
+      <p:cxnSp>
+        <p:nvCxnSpPr>
+          <p:cNvPr id="2" name="Connecteur : en angle 97">
             <a:extLst>
-              <a:ext uri="{53640926-AAD7-44D8-BBD7-CCE9431645EC}">
-                <a14:shadowObscured xmlns:a14="http://schemas.microsoft.com/office/drawing/2010/main"/>
+              <a:ext uri="{FF2B5EF4-FFF2-40B4-BE49-F238E27FC236}">
+                <a16:creationId xmlns:a16="http://schemas.microsoft.com/office/drawing/2014/main" id="{E5D30D6B-D0E7-91D1-A62F-2BD99E1D2788}"/>
               </a:ext>
             </a:extLst>
-          </p:spPr>
-        </p:pic>
-        <p:pic>
-          <p:nvPicPr>
-            <p:cNvPr id="282" name="Image 281">
-              <a:extLst>
-                <a:ext uri="{FF2B5EF4-FFF2-40B4-BE49-F238E27FC236}">
-                  <a16:creationId xmlns:a16="http://schemas.microsoft.com/office/drawing/2014/main" id="{D2B5E59A-955D-6E37-70A8-EF428207DD59}"/>
-                </a:ext>
-              </a:extLst>
-            </p:cNvPr>
-            <p:cNvPicPr>
-              <a:picLocks noChangeAspect="1"/>
-            </p:cNvPicPr>
-            <p:nvPr/>
-          </p:nvPicPr>
-          <p:blipFill rotWithShape="1">
-            <a:blip r:embed="rId13">
-              <a:extLst>
-                <a:ext uri="{28A0092B-C50C-407E-A947-70E740481C1C}">
-                  <a14:useLocalDpi xmlns:a14="http://schemas.microsoft.com/office/drawing/2010/main" val="0"/>
-                </a:ext>
-              </a:extLst>
-            </a:blip>
-            <a:srcRect l="35764" r="35779" b="24600"/>
-            <a:stretch>
-              <a:fillRect/>
-            </a:stretch>
-          </p:blipFill>
-          <p:spPr bwMode="auto">
-            <a:xfrm>
-              <a:off x="168923" y="2084344"/>
-              <a:ext cx="2938145" cy="871855"/>
-            </a:xfrm>
-            <a:prstGeom prst="rect">
-              <a:avLst/>
-            </a:prstGeom>
-            <a:noFill/>
-            <a:ln>
-              <a:noFill/>
-            </a:ln>
+          </p:cNvPr>
+          <p:cNvCxnSpPr>
+            <a:cxnSpLocks/>
+            <a:stCxn id="151" idx="3"/>
+            <a:endCxn id="216" idx="1"/>
+          </p:cNvCxnSpPr>
+          <p:nvPr/>
+        </p:nvCxnSpPr>
+        <p:spPr>
+          <a:xfrm flipV="1">
+            <a:off x="4205447" y="3606822"/>
+            <a:ext cx="774704" cy="244957"/>
+          </a:xfrm>
+          <a:prstGeom prst="straightConnector1">
+            <a:avLst/>
+          </a:prstGeom>
+          <a:ln>
+            <a:prstDash val="sysDash"/>
+            <a:tailEnd type="triangle"/>
+          </a:ln>
+        </p:spPr>
+        <p:style>
+          <a:lnRef idx="2">
+            <a:schemeClr val="accent1"/>
+          </a:lnRef>
+          <a:fillRef idx="0">
+            <a:schemeClr val="accent1"/>
+          </a:fillRef>
+          <a:effectRef idx="1">
+            <a:schemeClr val="accent1"/>
+          </a:effectRef>
+          <a:fontRef idx="minor">
+            <a:schemeClr val="tx1"/>
+          </a:fontRef>
+        </p:style>
+      </p:cxnSp>
+      <p:pic>
+        <p:nvPicPr>
+          <p:cNvPr id="38" name="Graphique 37" descr="Couronne avec un remplissage uni">
             <a:extLst>
-              <a:ext uri="{53640926-AAD7-44D8-BBD7-CCE9431645EC}">
-                <a14:shadowObscured xmlns:a14="http://schemas.microsoft.com/office/drawing/2010/main"/>
+              <a:ext uri="{FF2B5EF4-FFF2-40B4-BE49-F238E27FC236}">
+                <a16:creationId xmlns:a16="http://schemas.microsoft.com/office/drawing/2014/main" id="{ADF59C5C-A511-D993-4575-6B0F9AE66F12}"/>
               </a:ext>
             </a:extLst>
-          </p:spPr>
-        </p:pic>
-        <p:pic>
-          <p:nvPicPr>
-            <p:cNvPr id="283" name="Image 282">
-              <a:extLst>
-                <a:ext uri="{FF2B5EF4-FFF2-40B4-BE49-F238E27FC236}">
-                  <a16:creationId xmlns:a16="http://schemas.microsoft.com/office/drawing/2014/main" id="{08814F9E-50BE-0635-BF03-7D7E6B225C9D}"/>
-                </a:ext>
-              </a:extLst>
-            </p:cNvPr>
-            <p:cNvPicPr>
-              <a:picLocks noChangeAspect="1"/>
-            </p:cNvPicPr>
-            <p:nvPr/>
-          </p:nvPicPr>
-          <p:blipFill>
-            <a:blip r:embed="rId14">
-              <a:lum bright="70000" contrast="-70000"/>
-              <a:extLst>
-                <a:ext uri="{28A0092B-C50C-407E-A947-70E740481C1C}">
-                  <a14:useLocalDpi xmlns:a14="http://schemas.microsoft.com/office/drawing/2010/main" val="0"/>
-                </a:ext>
-              </a:extLst>
-            </a:blip>
-            <a:srcRect/>
-            <a:stretch>
-              <a:fillRect/>
-            </a:stretch>
-          </p:blipFill>
-          <p:spPr bwMode="auto">
-            <a:xfrm>
-              <a:off x="3125028" y="2179346"/>
-              <a:ext cx="719992" cy="720000"/>
-            </a:xfrm>
-            <a:prstGeom prst="rect">
-              <a:avLst/>
-            </a:prstGeom>
-            <a:noFill/>
-            <a:ln>
-              <a:noFill/>
-            </a:ln>
-          </p:spPr>
-        </p:pic>
-        <p:pic>
-          <p:nvPicPr>
-            <p:cNvPr id="284" name="Image 283">
-              <a:extLst>
-                <a:ext uri="{FF2B5EF4-FFF2-40B4-BE49-F238E27FC236}">
-                  <a16:creationId xmlns:a16="http://schemas.microsoft.com/office/drawing/2014/main" id="{5B5F9645-D9FA-651C-390F-15C1E32D7521}"/>
-                </a:ext>
-              </a:extLst>
-            </p:cNvPr>
-            <p:cNvPicPr>
-              <a:picLocks noChangeAspect="1"/>
-            </p:cNvPicPr>
-            <p:nvPr/>
-          </p:nvPicPr>
-          <p:blipFill>
-            <a:blip r:embed="rId14">
-              <a:lum bright="70000" contrast="-70000"/>
-              <a:extLst>
-                <a:ext uri="{28A0092B-C50C-407E-A947-70E740481C1C}">
-                  <a14:useLocalDpi xmlns:a14="http://schemas.microsoft.com/office/drawing/2010/main" val="0"/>
-                </a:ext>
-              </a:extLst>
-            </a:blip>
-            <a:srcRect/>
-            <a:stretch>
-              <a:fillRect/>
-            </a:stretch>
-          </p:blipFill>
-          <p:spPr bwMode="auto">
-            <a:xfrm flipH="1">
-              <a:off x="191863" y="87418"/>
-              <a:ext cx="719991" cy="720000"/>
-            </a:xfrm>
-            <a:prstGeom prst="rect">
-              <a:avLst/>
-            </a:prstGeom>
-            <a:noFill/>
-            <a:ln>
-              <a:noFill/>
-            </a:ln>
-          </p:spPr>
-        </p:pic>
-      </p:grpSp>
+          </p:cNvPr>
+          <p:cNvPicPr>
+            <a:picLocks noChangeAspect="1"/>
+          </p:cNvPicPr>
+          <p:nvPr/>
+        </p:nvPicPr>
+        <p:blipFill>
+          <a:blip>
+            <a:extLst>
+              <a:ext uri="{96DAC541-7B7A-43D3-8B79-37D633B846F1}">
+                <asvg:svgBlip xmlns:asvg="http://schemas.microsoft.com/office/drawing/2016/SVG/main" r:embed="rId11"/>
+              </a:ext>
+            </a:extLst>
+          </a:blip>
+          <a:stretch>
+            <a:fillRect/>
+          </a:stretch>
+        </p:blipFill>
+        <p:spPr>
+          <a:xfrm>
+            <a:off x="375260" y="6121536"/>
+            <a:ext cx="914400" cy="914400"/>
+          </a:xfrm>
+          <a:prstGeom prst="rect">
+            <a:avLst/>
+          </a:prstGeom>
+        </p:spPr>
+      </p:pic>
     </p:spTree>
     <p:extLst>
       <p:ext uri="{BB962C8B-B14F-4D97-AF65-F5344CB8AC3E}">
